--- a/Documentation/Reports and Papers/Dissertation/Figures/70-overall/components/sensorium_hierarchy.pptx
+++ b/Documentation/Reports and Papers/Dissertation/Figures/70-overall/components/sensorium_hierarchy.pptx
@@ -7,7 +7,7 @@
   <p:sldIdLst>
     <p:sldId id="256" r:id="rId7"/>
   </p:sldIdLst>
-  <p:sldSz cx="5616000" cy="3096000" type="screen4x3"/>
+  <p:sldSz cx="5943600" cy="4406900" type="screen4x3"/>
   <p:notesSz cx="6858000" cy="9144000"/>
   <p:defaultTextStyle>
     <a:defPPr>
@@ -3096,8 +3096,8 @@
         </p:nvSpPr>
         <p:spPr>
           <a:xfrm>
-            <a:off x="72000" y="90000"/>
-            <a:ext cx="2880000" cy="270000"/>
+            <a:off x="152400" y="76200"/>
+            <a:ext cx="5638800" cy="228600"/>
           </a:xfrm>
           <a:prstGeom prst="rect">
             <a:avLst/>
@@ -3105,116 +3105,54 @@
           <a:noFill/>
         </p:spPr>
         <p:txBody>
-          <a:bodyPr wrap="square" lIns="10800" rIns="10800" tIns="3600" bIns="3600">
-            <a:spAutoFit/>
+          <a:bodyPr wrap="none" lIns="0" rIns="0" tIns="0" bIns="0">
+            <a:noAutofit/>
           </a:bodyPr>
           <a:lstStyle/>
           <a:p>
-            <a:pPr algn="l"/>
-            <a:r>
-              <a:rPr sz="1000" b="1">
+            <a:pPr algn="l">
+              <a:lnSpc>
+                <a:spcPts val="1320"/>
+              </a:lnSpc>
+              <a:spcBef>
+                <a:spcPts val="0"/>
+              </a:spcBef>
+              <a:spcAft>
+                <a:spcPts val="0"/>
+              </a:spcAft>
+            </a:pPr>
+            <a:r>
+              <a:rPr sz="1200" b="1" i="0">
                 <a:solidFill>
-                  <a:srgbClr val="1F1F1F"/>
+                  <a:srgbClr val="243343"/>
                 </a:solidFill>
                 <a:latin typeface="Arial"/>
               </a:rPr>
-              <a:t>Supraspinal additions (future work)</a:t>
-            </a:r>
-          </a:p>
-        </p:txBody>
-      </p:sp>
-      <p:sp>
-        <p:nvSpPr>
-          <p:cNvPr id="3" name="TextBox 2"/>
-          <p:cNvSpPr txBox="1"/>
+              <a:t>Proposed supraspinal additions</a:t>
+            </a:r>
+          </a:p>
+        </p:txBody>
+      </p:sp>
+      <p:sp>
+        <p:nvSpPr>
+          <p:cNvPr id="3" name="Rectangle 2"/>
+          <p:cNvSpPr/>
           <p:nvPr/>
         </p:nvSpPr>
         <p:spPr>
           <a:xfrm>
-            <a:off x="72000" y="1134000"/>
-            <a:ext cx="2880000" cy="270000"/>
+            <a:off x="152400" y="431800"/>
+            <a:ext cx="1625600" cy="736600"/>
           </a:xfrm>
           <a:prstGeom prst="rect">
             <a:avLst/>
           </a:prstGeom>
-          <a:noFill/>
-        </p:spPr>
-        <p:txBody>
-          <a:bodyPr wrap="square" lIns="10800" rIns="10800" tIns="3600" bIns="3600">
-            <a:spAutoFit/>
-          </a:bodyPr>
-          <a:lstStyle/>
-          <a:p>
-            <a:pPr algn="l"/>
-            <a:r>
-              <a:rPr sz="1000" b="1">
-                <a:solidFill>
-                  <a:srgbClr val="1F1F1F"/>
-                </a:solidFill>
-                <a:latin typeface="Arial"/>
-              </a:rPr>
-              <a:t>Spinal network (implemented, Ch. 6)</a:t>
-            </a:r>
-          </a:p>
-        </p:txBody>
-      </p:sp>
-      <p:sp>
-        <p:nvSpPr>
-          <p:cNvPr id="4" name="TextBox 3"/>
-          <p:cNvSpPr txBox="1"/>
-          <p:nvPr/>
-        </p:nvSpPr>
-        <p:spPr>
-          <a:xfrm>
-            <a:off x="72000" y="2178000"/>
-            <a:ext cx="2880000" cy="270000"/>
-          </a:xfrm>
-          <a:prstGeom prst="rect">
-            <a:avLst/>
-          </a:prstGeom>
-          <a:noFill/>
-        </p:spPr>
-        <p:txBody>
-          <a:bodyPr wrap="square" lIns="10800" rIns="10800" tIns="3600" bIns="3600">
-            <a:spAutoFit/>
-          </a:bodyPr>
-          <a:lstStyle/>
-          <a:p>
-            <a:pPr algn="l"/>
-            <a:r>
-              <a:rPr sz="1000" b="1">
-                <a:solidFill>
-                  <a:srgbClr val="1F1F1F"/>
-                </a:solidFill>
-                <a:latin typeface="Arial"/>
-              </a:rPr>
-              <a:t>Body (demonstrated in hardware)</a:t>
-            </a:r>
-          </a:p>
-        </p:txBody>
-      </p:sp>
-      <p:sp>
-        <p:nvSpPr>
-          <p:cNvPr id="5" name="Rounded Rectangle 4"/>
-          <p:cNvSpPr/>
-          <p:nvPr/>
-        </p:nvSpPr>
-        <p:spPr>
-          <a:xfrm>
-            <a:off x="72000" y="306000"/>
-            <a:ext cx="1565999" cy="558000"/>
-          </a:xfrm>
-          <a:prstGeom prst="roundRect">
-            <a:avLst>
-              <a:gd name="adj" fmla="val 10000"/>
-            </a:avLst>
-          </a:prstGeom>
           <a:solidFill>
-            <a:srgbClr val="F2F2F2"/>
+            <a:srgbClr val="F1F5F8"/>
           </a:solidFill>
           <a:ln w="12700">
             <a:solidFill>
-              <a:srgbClr val="1F1F1F"/>
+              <a:srgbClr val="243343"/>
             </a:solidFill>
             <a:prstDash val="dash"/>
           </a:ln>
@@ -3234,38 +3172,117 @@
           </a:fontRef>
         </p:style>
         <p:txBody>
-          <a:bodyPr rtlCol="0" anchor="ctr" wrap="square" lIns="43200" rIns="43200" tIns="21600" bIns="21600"/>
+          <a:bodyPr rtlCol="0" anchor="ctr"/>
           <a:lstStyle/>
           <a:p>
             <a:pPr algn="ctr"/>
-            <a:r>
-              <a:rPr sz="1000">
+          </a:p>
+        </p:txBody>
+      </p:sp>
+      <p:sp>
+        <p:nvSpPr>
+          <p:cNvPr id="4" name="TextBox 3"/>
+          <p:cNvSpPr txBox="1"/>
+          <p:nvPr/>
+        </p:nvSpPr>
+        <p:spPr>
+          <a:xfrm>
+            <a:off x="241300" y="544194"/>
+            <a:ext cx="1447800" cy="160654"/>
+          </a:xfrm>
+          <a:prstGeom prst="rect">
+            <a:avLst/>
+          </a:prstGeom>
+          <a:noFill/>
+        </p:spPr>
+        <p:txBody>
+          <a:bodyPr wrap="none" lIns="0" rIns="0" tIns="0" bIns="0">
+            <a:noAutofit/>
+          </a:bodyPr>
+          <a:lstStyle/>
+          <a:p>
+            <a:pPr algn="ctr">
+              <a:lnSpc>
+                <a:spcPts val="1210"/>
+              </a:lnSpc>
+              <a:spcBef>
+                <a:spcPts val="0"/>
+              </a:spcBef>
+              <a:spcAft>
+                <a:spcPts val="0"/>
+              </a:spcAft>
+            </a:pPr>
+            <a:r>
+              <a:rPr sz="1100" b="1" i="0">
                 <a:solidFill>
-                  <a:srgbClr val="1F1F1F"/>
+                  <a:srgbClr val="243343"/>
                 </a:solidFill>
                 <a:latin typeface="Arial"/>
               </a:rPr>
               <a:t>Basal ganglia</a:t>
             </a:r>
           </a:p>
-          <a:p>
-            <a:pPr algn="ctr"/>
-            <a:r>
-              <a:rPr sz="1000">
+        </p:txBody>
+      </p:sp>
+      <p:sp>
+        <p:nvSpPr>
+          <p:cNvPr id="5" name="TextBox 4"/>
+          <p:cNvSpPr txBox="1"/>
+          <p:nvPr/>
+        </p:nvSpPr>
+        <p:spPr>
+          <a:xfrm>
+            <a:off x="241300" y="761365"/>
+            <a:ext cx="1447800" cy="324104"/>
+          </a:xfrm>
+          <a:prstGeom prst="rect">
+            <a:avLst/>
+          </a:prstGeom>
+          <a:noFill/>
+        </p:spPr>
+        <p:txBody>
+          <a:bodyPr wrap="none" lIns="0" rIns="0" tIns="0" bIns="0">
+            <a:noAutofit/>
+          </a:bodyPr>
+          <a:lstStyle/>
+          <a:p>
+            <a:pPr algn="ctr">
+              <a:lnSpc>
+                <a:spcPts val="1210"/>
+              </a:lnSpc>
+              <a:spcBef>
+                <a:spcPts val="0"/>
+              </a:spcBef>
+              <a:spcAft>
+                <a:spcPts val="0"/>
+              </a:spcAft>
+            </a:pPr>
+            <a:r>
+              <a:rPr sz="1100" b="0" i="0">
                 <a:solidFill>
-                  <a:srgbClr val="1F1F1F"/>
+                  <a:srgbClr val="243343"/>
                 </a:solidFill>
                 <a:latin typeface="Arial"/>
               </a:rPr>
-              <a:t>action and mode</a:t>
-            </a:r>
-          </a:p>
-          <a:p>
-            <a:pPr algn="ctr"/>
-            <a:r>
-              <a:rPr sz="1000">
+              <a:t>Action and mode</a:t>
+            </a:r>
+          </a:p>
+          <a:p>
+            <a:pPr algn="ctr">
+              <a:lnSpc>
+                <a:spcPts val="1210"/>
+              </a:lnSpc>
+              <a:spcBef>
+                <a:spcPts val="0"/>
+              </a:spcBef>
+              <a:spcAft>
+                <a:spcPts val="0"/>
+              </a:spcAft>
+            </a:pPr>
+            <a:r>
+              <a:rPr sz="1100" b="0" i="0">
                 <a:solidFill>
-                  <a:srgbClr val="1F1F1F"/>
+                  <a:srgbClr val="243343"/>
                 </a:solidFill>
                 <a:latin typeface="Arial"/>
               </a:rPr>
@@ -3276,26 +3293,24 @@
       </p:sp>
       <p:sp>
         <p:nvSpPr>
-          <p:cNvPr id="6" name="Rounded Rectangle 5"/>
+          <p:cNvPr id="6" name="Rectangle 5"/>
           <p:cNvSpPr/>
           <p:nvPr/>
         </p:nvSpPr>
         <p:spPr>
           <a:xfrm>
-            <a:off x="2015999" y="306000"/>
-            <a:ext cx="1565999" cy="558000"/>
-          </a:xfrm>
-          <a:prstGeom prst="roundRect">
-            <a:avLst>
-              <a:gd name="adj" fmla="val 10000"/>
-            </a:avLst>
+            <a:off x="2159000" y="431800"/>
+            <a:ext cx="1625600" cy="736600"/>
+          </a:xfrm>
+          <a:prstGeom prst="rect">
+            <a:avLst/>
           </a:prstGeom>
           <a:solidFill>
-            <a:srgbClr val="F2F2F2"/>
+            <a:srgbClr val="F1F5F8"/>
           </a:solidFill>
           <a:ln w="12700">
             <a:solidFill>
-              <a:srgbClr val="1F1F1F"/>
+              <a:srgbClr val="243343"/>
             </a:solidFill>
             <a:prstDash val="dash"/>
           </a:ln>
@@ -3315,38 +3330,117 @@
           </a:fontRef>
         </p:style>
         <p:txBody>
-          <a:bodyPr rtlCol="0" anchor="ctr" wrap="square" lIns="43200" rIns="43200" tIns="21600" bIns="21600"/>
+          <a:bodyPr rtlCol="0" anchor="ctr"/>
           <a:lstStyle/>
           <a:p>
             <a:pPr algn="ctr"/>
-            <a:r>
-              <a:rPr sz="1000">
+          </a:p>
+        </p:txBody>
+      </p:sp>
+      <p:sp>
+        <p:nvSpPr>
+          <p:cNvPr id="7" name="TextBox 6"/>
+          <p:cNvSpPr txBox="1"/>
+          <p:nvPr/>
+        </p:nvSpPr>
+        <p:spPr>
+          <a:xfrm>
+            <a:off x="2247900" y="544194"/>
+            <a:ext cx="1447800" cy="160654"/>
+          </a:xfrm>
+          <a:prstGeom prst="rect">
+            <a:avLst/>
+          </a:prstGeom>
+          <a:noFill/>
+        </p:spPr>
+        <p:txBody>
+          <a:bodyPr wrap="none" lIns="0" rIns="0" tIns="0" bIns="0">
+            <a:noAutofit/>
+          </a:bodyPr>
+          <a:lstStyle/>
+          <a:p>
+            <a:pPr algn="ctr">
+              <a:lnSpc>
+                <a:spcPts val="1210"/>
+              </a:lnSpc>
+              <a:spcBef>
+                <a:spcPts val="0"/>
+              </a:spcBef>
+              <a:spcAft>
+                <a:spcPts val="0"/>
+              </a:spcAft>
+            </a:pPr>
+            <a:r>
+              <a:rPr sz="1100" b="1" i="0">
                 <a:solidFill>
-                  <a:srgbClr val="1F1F1F"/>
+                  <a:srgbClr val="243343"/>
                 </a:solidFill>
                 <a:latin typeface="Arial"/>
               </a:rPr>
-              <a:t>Cerebellar adaptive</a:t>
-            </a:r>
-          </a:p>
-          <a:p>
-            <a:pPr algn="ctr"/>
-            <a:r>
-              <a:rPr sz="1000">
+              <a:t>Cerebellum</a:t>
+            </a:r>
+          </a:p>
+        </p:txBody>
+      </p:sp>
+      <p:sp>
+        <p:nvSpPr>
+          <p:cNvPr id="8" name="TextBox 7"/>
+          <p:cNvSpPr txBox="1"/>
+          <p:nvPr/>
+        </p:nvSpPr>
+        <p:spPr>
+          <a:xfrm>
+            <a:off x="2247900" y="761365"/>
+            <a:ext cx="1447800" cy="324104"/>
+          </a:xfrm>
+          <a:prstGeom prst="rect">
+            <a:avLst/>
+          </a:prstGeom>
+          <a:noFill/>
+        </p:spPr>
+        <p:txBody>
+          <a:bodyPr wrap="none" lIns="0" rIns="0" tIns="0" bIns="0">
+            <a:noAutofit/>
+          </a:bodyPr>
+          <a:lstStyle/>
+          <a:p>
+            <a:pPr algn="ctr">
+              <a:lnSpc>
+                <a:spcPts val="1210"/>
+              </a:lnSpc>
+              <a:spcBef>
+                <a:spcPts val="0"/>
+              </a:spcBef>
+              <a:spcAft>
+                <a:spcPts val="0"/>
+              </a:spcAft>
+            </a:pPr>
+            <a:r>
+              <a:rPr sz="1100" b="0" i="0">
                 <a:solidFill>
-                  <a:srgbClr val="1F1F1F"/>
+                  <a:srgbClr val="243343"/>
                 </a:solidFill>
                 <a:latin typeface="Arial"/>
               </a:rPr>
-              <a:t>gateway: gait gating</a:t>
-            </a:r>
-          </a:p>
-          <a:p>
-            <a:pPr algn="ctr"/>
-            <a:r>
-              <a:rPr sz="1000">
+              <a:t>Adaptive gait gating</a:t>
+            </a:r>
+          </a:p>
+          <a:p>
+            <a:pPr algn="ctr">
+              <a:lnSpc>
+                <a:spcPts val="1210"/>
+              </a:lnSpc>
+              <a:spcBef>
+                <a:spcPts val="0"/>
+              </a:spcBef>
+              <a:spcAft>
+                <a:spcPts val="0"/>
+              </a:spcAft>
+            </a:pPr>
+            <a:r>
+              <a:rPr sz="1100" b="0" i="0">
                 <a:solidFill>
-                  <a:srgbClr val="1F1F1F"/>
+                  <a:srgbClr val="243343"/>
                 </a:solidFill>
                 <a:latin typeface="Arial"/>
               </a:rPr>
@@ -3357,26 +3451,24 @@
       </p:sp>
       <p:sp>
         <p:nvSpPr>
-          <p:cNvPr id="7" name="Rounded Rectangle 6"/>
+          <p:cNvPr id="9" name="Rectangle 8"/>
           <p:cNvSpPr/>
           <p:nvPr/>
         </p:nvSpPr>
         <p:spPr>
           <a:xfrm>
-            <a:off x="3960000" y="306000"/>
-            <a:ext cx="1584000" cy="558000"/>
-          </a:xfrm>
-          <a:prstGeom prst="roundRect">
-            <a:avLst>
-              <a:gd name="adj" fmla="val 10000"/>
-            </a:avLst>
+            <a:off x="4165600" y="431800"/>
+            <a:ext cx="1625600" cy="736600"/>
+          </a:xfrm>
+          <a:prstGeom prst="rect">
+            <a:avLst/>
           </a:prstGeom>
           <a:solidFill>
-            <a:srgbClr val="F2F2F2"/>
+            <a:srgbClr val="F1F5F8"/>
           </a:solidFill>
           <a:ln w="12700">
             <a:solidFill>
-              <a:srgbClr val="1F1F1F"/>
+              <a:srgbClr val="243343"/>
             </a:solidFill>
             <a:prstDash val="dash"/>
           </a:ln>
@@ -3396,68 +3488,190 @@
           </a:fontRef>
         </p:style>
         <p:txBody>
-          <a:bodyPr rtlCol="0" anchor="ctr" wrap="square" lIns="43200" rIns="43200" tIns="21600" bIns="21600"/>
+          <a:bodyPr rtlCol="0" anchor="ctr"/>
           <a:lstStyle/>
           <a:p>
             <a:pPr algn="ctr"/>
-            <a:r>
-              <a:rPr sz="1000">
+          </a:p>
+        </p:txBody>
+      </p:sp>
+      <p:sp>
+        <p:nvSpPr>
+          <p:cNvPr id="10" name="TextBox 9"/>
+          <p:cNvSpPr txBox="1"/>
+          <p:nvPr/>
+        </p:nvSpPr>
+        <p:spPr>
+          <a:xfrm>
+            <a:off x="4254500" y="544194"/>
+            <a:ext cx="1447800" cy="160654"/>
+          </a:xfrm>
+          <a:prstGeom prst="rect">
+            <a:avLst/>
+          </a:prstGeom>
+          <a:noFill/>
+        </p:spPr>
+        <p:txBody>
+          <a:bodyPr wrap="none" lIns="0" rIns="0" tIns="0" bIns="0">
+            <a:noAutofit/>
+          </a:bodyPr>
+          <a:lstStyle/>
+          <a:p>
+            <a:pPr algn="ctr">
+              <a:lnSpc>
+                <a:spcPts val="1210"/>
+              </a:lnSpc>
+              <a:spcBef>
+                <a:spcPts val="0"/>
+              </a:spcBef>
+              <a:spcAft>
+                <a:spcPts val="0"/>
+              </a:spcAft>
+            </a:pPr>
+            <a:r>
+              <a:rPr sz="1100" b="1" i="0">
                 <a:solidFill>
-                  <a:srgbClr val="1F1F1F"/>
+                  <a:srgbClr val="243343"/>
                 </a:solidFill>
                 <a:latin typeface="Arial"/>
               </a:rPr>
-              <a:t>Vestibular and ocular</a:t>
-            </a:r>
-          </a:p>
-          <a:p>
-            <a:pPr algn="ctr"/>
-            <a:r>
-              <a:rPr sz="1000">
+              <a:t>Vestibular / ocular</a:t>
+            </a:r>
+          </a:p>
+        </p:txBody>
+      </p:sp>
+      <p:sp>
+        <p:nvSpPr>
+          <p:cNvPr id="11" name="TextBox 10"/>
+          <p:cNvSpPr txBox="1"/>
+          <p:nvPr/>
+        </p:nvSpPr>
+        <p:spPr>
+          <a:xfrm>
+            <a:off x="4254500" y="761365"/>
+            <a:ext cx="1447800" cy="324104"/>
+          </a:xfrm>
+          <a:prstGeom prst="rect">
+            <a:avLst/>
+          </a:prstGeom>
+          <a:noFill/>
+        </p:spPr>
+        <p:txBody>
+          <a:bodyPr wrap="none" lIns="0" rIns="0" tIns="0" bIns="0">
+            <a:noAutofit/>
+          </a:bodyPr>
+          <a:lstStyle/>
+          <a:p>
+            <a:pPr algn="ctr">
+              <a:lnSpc>
+                <a:spcPts val="1210"/>
+              </a:lnSpc>
+              <a:spcBef>
+                <a:spcPts val="0"/>
+              </a:spcBef>
+              <a:spcAft>
+                <a:spcPts val="0"/>
+              </a:spcAft>
+            </a:pPr>
+            <a:r>
+              <a:rPr sz="1100" b="0" i="0">
                 <a:solidFill>
-                  <a:srgbClr val="1F1F1F"/>
+                  <a:srgbClr val="243343"/>
                 </a:solidFill>
                 <a:latin typeface="Arial"/>
               </a:rPr>
-              <a:t>sensing: IMU orientation,</a:t>
-            </a:r>
-          </a:p>
-          <a:p>
-            <a:pPr algn="ctr"/>
-            <a:r>
-              <a:rPr sz="1000">
+              <a:t>Orientation sensing</a:t>
+            </a:r>
+          </a:p>
+          <a:p>
+            <a:pPr algn="ctr">
+              <a:lnSpc>
+                <a:spcPts val="1210"/>
+              </a:lnSpc>
+              <a:spcBef>
+                <a:spcPts val="0"/>
+              </a:spcBef>
+              <a:spcAft>
+                <a:spcPts val="0"/>
+              </a:spcAft>
+            </a:pPr>
+            <a:r>
+              <a:rPr sz="1100" b="0" i="0">
                 <a:solidFill>
-                  <a:srgbClr val="1F1F1F"/>
+                  <a:srgbClr val="243343"/>
                 </a:solidFill>
                 <a:latin typeface="Arial"/>
               </a:rPr>
-              <a:t>visual drift correction</a:t>
-            </a:r>
-          </a:p>
-        </p:txBody>
-      </p:sp>
-      <p:sp>
-        <p:nvSpPr>
-          <p:cNvPr id="8" name="Rounded Rectangle 7"/>
+              <a:t>and visual correction</a:t>
+            </a:r>
+          </a:p>
+        </p:txBody>
+      </p:sp>
+      <p:sp>
+        <p:nvSpPr>
+          <p:cNvPr id="12" name="TextBox 11"/>
+          <p:cNvSpPr txBox="1"/>
+          <p:nvPr/>
+        </p:nvSpPr>
+        <p:spPr>
+          <a:xfrm>
+            <a:off x="152400" y="1612900"/>
+            <a:ext cx="5207000" cy="228600"/>
+          </a:xfrm>
+          <a:prstGeom prst="rect">
+            <a:avLst/>
+          </a:prstGeom>
+          <a:noFill/>
+        </p:spPr>
+        <p:txBody>
+          <a:bodyPr wrap="none" lIns="0" rIns="0" tIns="0" bIns="0">
+            <a:noAutofit/>
+          </a:bodyPr>
+          <a:lstStyle/>
+          <a:p>
+            <a:pPr algn="l">
+              <a:lnSpc>
+                <a:spcPts val="1320"/>
+              </a:lnSpc>
+              <a:spcBef>
+                <a:spcPts val="0"/>
+              </a:spcBef>
+              <a:spcAft>
+                <a:spcPts val="0"/>
+              </a:spcAft>
+            </a:pPr>
+            <a:r>
+              <a:rPr sz="1200" b="1" i="0">
+                <a:solidFill>
+                  <a:srgbClr val="243343"/>
+                </a:solidFill>
+                <a:latin typeface="Arial"/>
+              </a:rPr>
+              <a:t>Spinal network (Ch. 6)</a:t>
+            </a:r>
+          </a:p>
+        </p:txBody>
+      </p:sp>
+      <p:sp>
+        <p:nvSpPr>
+          <p:cNvPr id="13" name="Rectangle 12"/>
           <p:cNvSpPr/>
           <p:nvPr/>
         </p:nvSpPr>
         <p:spPr>
           <a:xfrm>
-            <a:off x="72000" y="1350000"/>
-            <a:ext cx="1565999" cy="522000"/>
-          </a:xfrm>
-          <a:prstGeom prst="roundRect">
-            <a:avLst>
-              <a:gd name="adj" fmla="val 10000"/>
-            </a:avLst>
+            <a:off x="152400" y="1943100"/>
+            <a:ext cx="2209800" cy="635000"/>
+          </a:xfrm>
+          <a:prstGeom prst="rect">
+            <a:avLst/>
           </a:prstGeom>
           <a:solidFill>
-            <a:srgbClr val="F2F2F2"/>
+            <a:srgbClr val="F1F5F8"/>
           </a:solidFill>
           <a:ln w="12700">
             <a:solidFill>
-              <a:srgbClr val="1F1F1F"/>
+              <a:srgbClr val="243343"/>
             </a:solidFill>
           </a:ln>
         </p:spPr>
@@ -3476,68 +3690,123 @@
           </a:fontRef>
         </p:style>
         <p:txBody>
-          <a:bodyPr rtlCol="0" anchor="ctr" wrap="square" lIns="43200" rIns="43200" tIns="21600" bIns="21600"/>
+          <a:bodyPr rtlCol="0" anchor="ctr"/>
           <a:lstStyle/>
           <a:p>
             <a:pPr algn="ctr"/>
-            <a:r>
-              <a:rPr sz="1000">
+          </a:p>
+        </p:txBody>
+      </p:sp>
+      <p:sp>
+        <p:nvSpPr>
+          <p:cNvPr id="14" name="TextBox 13"/>
+          <p:cNvSpPr txBox="1"/>
+          <p:nvPr/>
+        </p:nvSpPr>
+        <p:spPr>
+          <a:xfrm>
+            <a:off x="241300" y="2081530"/>
+            <a:ext cx="2032000" cy="160654"/>
+          </a:xfrm>
+          <a:prstGeom prst="rect">
+            <a:avLst/>
+          </a:prstGeom>
+          <a:noFill/>
+        </p:spPr>
+        <p:txBody>
+          <a:bodyPr wrap="none" lIns="0" rIns="0" tIns="0" bIns="0">
+            <a:noAutofit/>
+          </a:bodyPr>
+          <a:lstStyle/>
+          <a:p>
+            <a:pPr algn="ctr">
+              <a:lnSpc>
+                <a:spcPts val="1210"/>
+              </a:lnSpc>
+              <a:spcBef>
+                <a:spcPts val="0"/>
+              </a:spcBef>
+              <a:spcAft>
+                <a:spcPts val="0"/>
+              </a:spcAft>
+            </a:pPr>
+            <a:r>
+              <a:rPr sz="1100" b="1" i="0">
                 <a:solidFill>
-                  <a:srgbClr val="1F1F1F"/>
+                  <a:srgbClr val="243343"/>
                 </a:solidFill>
                 <a:latin typeface="Arial"/>
               </a:rPr>
-              <a:t>Two-level CPG: rhythm</a:t>
-            </a:r>
-          </a:p>
-          <a:p>
-            <a:pPr algn="ctr"/>
-            <a:r>
-              <a:rPr sz="1000">
+              <a:t>Two-level CPG</a:t>
+            </a:r>
+          </a:p>
+        </p:txBody>
+      </p:sp>
+      <p:sp>
+        <p:nvSpPr>
+          <p:cNvPr id="15" name="TextBox 14"/>
+          <p:cNvSpPr txBox="1"/>
+          <p:nvPr/>
+        </p:nvSpPr>
+        <p:spPr>
+          <a:xfrm>
+            <a:off x="241300" y="2298700"/>
+            <a:ext cx="2032000" cy="162052"/>
+          </a:xfrm>
+          <a:prstGeom prst="rect">
+            <a:avLst/>
+          </a:prstGeom>
+          <a:noFill/>
+        </p:spPr>
+        <p:txBody>
+          <a:bodyPr wrap="none" lIns="0" rIns="0" tIns="0" bIns="0">
+            <a:noAutofit/>
+          </a:bodyPr>
+          <a:lstStyle/>
+          <a:p>
+            <a:pPr algn="ctr">
+              <a:lnSpc>
+                <a:spcPts val="1210"/>
+              </a:lnSpc>
+              <a:spcBef>
+                <a:spcPts val="0"/>
+              </a:spcBef>
+              <a:spcAft>
+                <a:spcPts val="0"/>
+              </a:spcAft>
+            </a:pPr>
+            <a:r>
+              <a:rPr sz="1100" b="0" i="0">
                 <a:solidFill>
-                  <a:srgbClr val="1F1F1F"/>
+                  <a:srgbClr val="243343"/>
                 </a:solidFill>
                 <a:latin typeface="Arial"/>
               </a:rPr>
-              <a:t>generator and pattern</a:t>
-            </a:r>
-          </a:p>
-          <a:p>
-            <a:pPr algn="ctr"/>
-            <a:r>
-              <a:rPr sz="1000">
-                <a:solidFill>
-                  <a:srgbClr val="1F1F1F"/>
-                </a:solidFill>
-                <a:latin typeface="Arial"/>
-              </a:rPr>
-              <a:t>formation</a:t>
-            </a:r>
-          </a:p>
-        </p:txBody>
-      </p:sp>
-      <p:sp>
-        <p:nvSpPr>
-          <p:cNvPr id="9" name="Rounded Rectangle 8"/>
+              <a:t>Rhythm and pattern formation</a:t>
+            </a:r>
+          </a:p>
+        </p:txBody>
+      </p:sp>
+      <p:sp>
+        <p:nvSpPr>
+          <p:cNvPr id="16" name="Rectangle 15"/>
           <p:cNvSpPr/>
           <p:nvPr/>
         </p:nvSpPr>
         <p:spPr>
           <a:xfrm>
-            <a:off x="2015999" y="1350000"/>
-            <a:ext cx="1710000" cy="522000"/>
-          </a:xfrm>
-          <a:prstGeom prst="roundRect">
-            <a:avLst>
-              <a:gd name="adj" fmla="val 10000"/>
-            </a:avLst>
+            <a:off x="3009900" y="1943100"/>
+            <a:ext cx="2209800" cy="635000"/>
+          </a:xfrm>
+          <a:prstGeom prst="rect">
+            <a:avLst/>
           </a:prstGeom>
           <a:solidFill>
-            <a:srgbClr val="F2F2F2"/>
+            <a:srgbClr val="F1F5F8"/>
           </a:solidFill>
           <a:ln w="12700">
             <a:solidFill>
-              <a:srgbClr val="1F1F1F"/>
+              <a:srgbClr val="243343"/>
             </a:solidFill>
           </a:ln>
         </p:spPr>
@@ -3556,38 +3825,117 @@
           </a:fontRef>
         </p:style>
         <p:txBody>
-          <a:bodyPr rtlCol="0" anchor="ctr" wrap="square" lIns="43200" rIns="43200" tIns="21600" bIns="21600"/>
+          <a:bodyPr rtlCol="0" anchor="ctr"/>
           <a:lstStyle/>
           <a:p>
             <a:pPr algn="ctr"/>
-            <a:r>
-              <a:rPr sz="1000">
+          </a:p>
+        </p:txBody>
+      </p:sp>
+      <p:sp>
+        <p:nvSpPr>
+          <p:cNvPr id="17" name="TextBox 16"/>
+          <p:cNvSpPr txBox="1"/>
+          <p:nvPr/>
+        </p:nvSpPr>
+        <p:spPr>
+          <a:xfrm>
+            <a:off x="3098800" y="2004695"/>
+            <a:ext cx="2032000" cy="160654"/>
+          </a:xfrm>
+          <a:prstGeom prst="rect">
+            <a:avLst/>
+          </a:prstGeom>
+          <a:noFill/>
+        </p:spPr>
+        <p:txBody>
+          <a:bodyPr wrap="none" lIns="0" rIns="0" tIns="0" bIns="0">
+            <a:noAutofit/>
+          </a:bodyPr>
+          <a:lstStyle/>
+          <a:p>
+            <a:pPr algn="ctr">
+              <a:lnSpc>
+                <a:spcPts val="1210"/>
+              </a:lnSpc>
+              <a:spcBef>
+                <a:spcPts val="0"/>
+              </a:spcBef>
+              <a:spcAft>
+                <a:spcPts val="0"/>
+              </a:spcAft>
+            </a:pPr>
+            <a:r>
+              <a:rPr sz="1100" b="1" i="0">
                 <a:solidFill>
-                  <a:srgbClr val="1F1F1F"/>
+                  <a:srgbClr val="243343"/>
                 </a:solidFill>
                 <a:latin typeface="Arial"/>
               </a:rPr>
-              <a:t>Motor-neuron pools;</a:t>
-            </a:r>
-          </a:p>
-          <a:p>
-            <a:pPr algn="ctr"/>
-            <a:r>
-              <a:rPr sz="1000">
+              <a:t>Sensorimotor layer</a:t>
+            </a:r>
+          </a:p>
+        </p:txBody>
+      </p:sp>
+      <p:sp>
+        <p:nvSpPr>
+          <p:cNvPr id="18" name="TextBox 17"/>
+          <p:cNvSpPr txBox="1"/>
+          <p:nvPr/>
+        </p:nvSpPr>
+        <p:spPr>
+          <a:xfrm>
+            <a:off x="3098800" y="2221865"/>
+            <a:ext cx="2032000" cy="324104"/>
+          </a:xfrm>
+          <a:prstGeom prst="rect">
+            <a:avLst/>
+          </a:prstGeom>
+          <a:noFill/>
+        </p:spPr>
+        <p:txBody>
+          <a:bodyPr wrap="none" lIns="0" rIns="0" tIns="0" bIns="0">
+            <a:noAutofit/>
+          </a:bodyPr>
+          <a:lstStyle/>
+          <a:p>
+            <a:pPr algn="ctr">
+              <a:lnSpc>
+                <a:spcPts val="1210"/>
+              </a:lnSpc>
+              <a:spcBef>
+                <a:spcPts val="0"/>
+              </a:spcBef>
+              <a:spcAft>
+                <a:spcPts val="0"/>
+              </a:spcAft>
+            </a:pPr>
+            <a:r>
+              <a:rPr sz="1100" b="0" i="0">
                 <a:solidFill>
-                  <a:srgbClr val="1F1F1F"/>
+                  <a:srgbClr val="243343"/>
                 </a:solidFill>
                 <a:latin typeface="Arial"/>
               </a:rPr>
-              <a:t>Ia, Ib, and II afferents;</a:t>
-            </a:r>
-          </a:p>
-          <a:p>
-            <a:pPr algn="ctr"/>
-            <a:r>
-              <a:rPr sz="1000">
+              <a:t>Motor pools; Ia, Ib, II;</a:t>
+            </a:r>
+          </a:p>
+          <a:p>
+            <a:pPr algn="ctr">
+              <a:lnSpc>
+                <a:spcPts val="1210"/>
+              </a:lnSpc>
+              <a:spcBef>
+                <a:spcPts val="0"/>
+              </a:spcBef>
+              <a:spcAft>
+                <a:spcPts val="0"/>
+              </a:spcAft>
+            </a:pPr>
+            <a:r>
+              <a:rPr sz="1100" b="0" i="0">
                 <a:solidFill>
-                  <a:srgbClr val="1F1F1F"/>
+                  <a:srgbClr val="243343"/>
                 </a:solidFill>
                 <a:latin typeface="Arial"/>
               </a:rPr>
@@ -3596,81 +3944,25 @@
           </a:p>
         </p:txBody>
       </p:sp>
-      <p:sp>
-        <p:nvSpPr>
-          <p:cNvPr id="10" name="Rounded Rectangle 9"/>
-          <p:cNvSpPr/>
-          <p:nvPr/>
-        </p:nvSpPr>
-        <p:spPr>
-          <a:xfrm>
-            <a:off x="72000" y="2394000"/>
-            <a:ext cx="4680000" cy="432000"/>
-          </a:xfrm>
-          <a:prstGeom prst="roundRect">
-            <a:avLst>
-              <a:gd name="adj" fmla="val 10000"/>
-            </a:avLst>
-          </a:prstGeom>
-          <a:solidFill>
-            <a:srgbClr val="F2F2F2"/>
-          </a:solidFill>
-          <a:ln w="12700">
-            <a:solidFill>
-              <a:srgbClr val="1F1F1F"/>
-            </a:solidFill>
-          </a:ln>
-        </p:spPr>
-        <p:style>
-          <a:lnRef idx="1">
-            <a:schemeClr val="accent1"/>
-          </a:lnRef>
-          <a:fillRef idx="3">
-            <a:schemeClr val="accent1"/>
-          </a:fillRef>
-          <a:effectRef idx="2">
-            <a:schemeClr val="accent1"/>
-          </a:effectRef>
-          <a:fontRef idx="minor">
-            <a:schemeClr val="lt1"/>
-          </a:fontRef>
-        </p:style>
-        <p:txBody>
-          <a:bodyPr rtlCol="0" anchor="ctr" wrap="square" lIns="43200" rIns="43200" tIns="21600" bIns="21600"/>
-          <a:lstStyle/>
-          <a:p>
-            <a:pPr algn="ctr"/>
-            <a:r>
-              <a:rPr sz="1000">
-                <a:solidFill>
-                  <a:srgbClr val="1F1F1F"/>
-                </a:solidFill>
-                <a:latin typeface="Arial"/>
-              </a:rPr>
-              <a:t>BPA actuators and robot body</a:t>
-            </a:r>
-          </a:p>
-        </p:txBody>
-      </p:sp>
       <p:cxnSp>
         <p:nvCxnSpPr>
-          <p:cNvPr id="11" name="Connector 10"/>
+          <p:cNvPr id="19" name="Connector 18"/>
           <p:cNvCxnSpPr/>
           <p:nvPr/>
         </p:nvCxnSpPr>
         <p:spPr>
           <a:xfrm>
-            <a:off x="3438000" y="882000"/>
-            <a:ext cx="0" cy="450000"/>
+            <a:off x="2362200" y="2260600"/>
+            <a:ext cx="647700" cy="0"/>
           </a:xfrm>
           <a:prstGeom prst="line">
             <a:avLst/>
           </a:prstGeom>
           <a:ln w="12700">
             <a:solidFill>
-              <a:srgbClr val="1F1F1F"/>
+              <a:srgbClr val="243343"/>
             </a:solidFill>
-            <a:tailEnd type="triangle" w="med" len="med"/>
+            <a:tailEnd type="triangle" w="sm" len="sm"/>
           </a:ln>
         </p:spPr>
         <p:style>
@@ -3688,72 +3980,24 @@
           </a:fontRef>
         </p:style>
       </p:cxnSp>
-      <p:sp>
-        <p:nvSpPr>
-          <p:cNvPr id="12" name="TextBox 11"/>
-          <p:cNvSpPr txBox="1"/>
-          <p:nvPr/>
-        </p:nvSpPr>
-        <p:spPr>
-          <a:xfrm>
-            <a:off x="3510000" y="990000"/>
-            <a:ext cx="1224000" cy="270000"/>
-          </a:xfrm>
-          <a:prstGeom prst="rect">
-            <a:avLst/>
-          </a:prstGeom>
-          <a:noFill/>
-        </p:spPr>
-        <p:txBody>
-          <a:bodyPr wrap="square" lIns="10800" rIns="10800" tIns="3600" bIns="3600">
-            <a:spAutoFit/>
-          </a:bodyPr>
-          <a:lstStyle/>
-          <a:p>
-            <a:pPr algn="l"/>
-            <a:r>
-              <a:rPr sz="1000" b="0">
-                <a:solidFill>
-                  <a:srgbClr val="1F1F1F"/>
-                </a:solidFill>
-                <a:latin typeface="Arial"/>
-              </a:rPr>
-              <a:t>descending</a:t>
-            </a:r>
-          </a:p>
-          <a:p>
-            <a:pPr algn="l"/>
-            <a:r>
-              <a:rPr sz="1000" b="0">
-                <a:solidFill>
-                  <a:srgbClr val="1F1F1F"/>
-                </a:solidFill>
-                <a:latin typeface="Arial"/>
-              </a:rPr>
-              <a:t>commands</a:t>
-            </a:r>
-          </a:p>
-        </p:txBody>
-      </p:sp>
       <p:cxnSp>
         <p:nvCxnSpPr>
-          <p:cNvPr id="13" name="Connector 12"/>
+          <p:cNvPr id="20" name="Connector 19"/>
           <p:cNvCxnSpPr/>
           <p:nvPr/>
         </p:nvCxnSpPr>
         <p:spPr>
-          <a:xfrm>
-            <a:off x="2232000" y="1890000"/>
-            <a:ext cx="0" cy="486000"/>
+          <a:xfrm flipH="1">
+            <a:off x="2768600" y="2438400"/>
+            <a:ext cx="241300" cy="0"/>
           </a:xfrm>
           <a:prstGeom prst="line">
             <a:avLst/>
           </a:prstGeom>
           <a:ln w="12700">
             <a:solidFill>
-              <a:srgbClr val="1F1F1F"/>
+              <a:srgbClr val="243343"/>
             </a:solidFill>
-            <a:tailEnd type="triangle" w="med" len="med"/>
           </a:ln>
         </p:spPr>
         <p:style>
@@ -3771,60 +4015,24 @@
           </a:fontRef>
         </p:style>
       </p:cxnSp>
-      <p:sp>
-        <p:nvSpPr>
-          <p:cNvPr id="14" name="TextBox 13"/>
-          <p:cNvSpPr txBox="1"/>
-          <p:nvPr/>
-        </p:nvSpPr>
-        <p:spPr>
-          <a:xfrm>
-            <a:off x="1296000" y="1998000"/>
-            <a:ext cx="882000" cy="270000"/>
-          </a:xfrm>
-          <a:prstGeom prst="rect">
-            <a:avLst/>
-          </a:prstGeom>
-          <a:noFill/>
-        </p:spPr>
-        <p:txBody>
-          <a:bodyPr wrap="square" lIns="10800" rIns="10800" tIns="3600" bIns="3600">
-            <a:spAutoFit/>
-          </a:bodyPr>
-          <a:lstStyle/>
-          <a:p>
-            <a:pPr algn="r"/>
-            <a:r>
-              <a:rPr sz="1000" b="0">
-                <a:solidFill>
-                  <a:srgbClr val="1F1F1F"/>
-                </a:solidFill>
-                <a:latin typeface="Arial"/>
-              </a:rPr>
-              <a:t>activation</a:t>
-            </a:r>
-          </a:p>
-        </p:txBody>
-      </p:sp>
       <p:cxnSp>
         <p:nvCxnSpPr>
-          <p:cNvPr id="15" name="Connector 14"/>
+          <p:cNvPr id="21" name="Connector 20"/>
           <p:cNvCxnSpPr/>
           <p:nvPr/>
         </p:nvCxnSpPr>
         <p:spPr>
-          <a:xfrm flipV="1">
-            <a:off x="3078000" y="1900800"/>
-            <a:ext cx="0" cy="475200"/>
+          <a:xfrm>
+            <a:off x="2768600" y="2438400"/>
+            <a:ext cx="0" cy="546100"/>
           </a:xfrm>
           <a:prstGeom prst="line">
             <a:avLst/>
           </a:prstGeom>
           <a:ln w="12700">
             <a:solidFill>
-              <a:srgbClr val="1F1F1F"/>
+              <a:srgbClr val="243343"/>
             </a:solidFill>
-            <a:tailEnd type="triangle" w="med" len="med"/>
           </a:ln>
         </p:spPr>
         <p:style>
@@ -3842,72 +4050,24 @@
           </a:fontRef>
         </p:style>
       </p:cxnSp>
-      <p:sp>
-        <p:nvSpPr>
-          <p:cNvPr id="16" name="TextBox 15"/>
-          <p:cNvSpPr txBox="1"/>
-          <p:nvPr/>
-        </p:nvSpPr>
-        <p:spPr>
-          <a:xfrm>
-            <a:off x="3150000" y="1998000"/>
-            <a:ext cx="1368000" cy="270000"/>
-          </a:xfrm>
-          <a:prstGeom prst="rect">
-            <a:avLst/>
-          </a:prstGeom>
-          <a:noFill/>
-        </p:spPr>
-        <p:txBody>
-          <a:bodyPr wrap="square" lIns="10800" rIns="10800" tIns="3600" bIns="3600">
-            <a:spAutoFit/>
-          </a:bodyPr>
-          <a:lstStyle/>
-          <a:p>
-            <a:pPr algn="l"/>
-            <a:r>
-              <a:rPr sz="1000" b="0">
-                <a:solidFill>
-                  <a:srgbClr val="1F1F1F"/>
-                </a:solidFill>
-                <a:latin typeface="Arial"/>
-              </a:rPr>
-              <a:t>proprioceptive and</a:t>
-            </a:r>
-          </a:p>
-          <a:p>
-            <a:pPr algn="l"/>
-            <a:r>
-              <a:rPr sz="1000" b="0">
-                <a:solidFill>
-                  <a:srgbClr val="1F1F1F"/>
-                </a:solidFill>
-                <a:latin typeface="Arial"/>
-              </a:rPr>
-              <a:t>contact feedback</a:t>
-            </a:r>
-          </a:p>
-        </p:txBody>
-      </p:sp>
       <p:cxnSp>
         <p:nvCxnSpPr>
-          <p:cNvPr id="17" name="Connector 16"/>
+          <p:cNvPr id="22" name="Connector 21"/>
           <p:cNvCxnSpPr/>
           <p:nvPr/>
         </p:nvCxnSpPr>
         <p:spPr>
-          <a:xfrm flipV="1">
-            <a:off x="4752000" y="882000"/>
-            <a:ext cx="0" cy="1494000"/>
+          <a:xfrm flipH="1">
+            <a:off x="1257300" y="2984500"/>
+            <a:ext cx="1511300" cy="0"/>
           </a:xfrm>
           <a:prstGeom prst="line">
             <a:avLst/>
           </a:prstGeom>
           <a:ln w="12700">
             <a:solidFill>
-              <a:srgbClr val="1F1F1F"/>
+              <a:srgbClr val="243343"/>
             </a:solidFill>
-            <a:tailEnd type="triangle" w="med" len="med"/>
           </a:ln>
         </p:spPr>
         <p:style>
@@ -3925,16 +4085,52 @@
           </a:fontRef>
         </p:style>
       </p:cxnSp>
-      <p:sp>
-        <p:nvSpPr>
-          <p:cNvPr id="18" name="TextBox 17"/>
+      <p:cxnSp>
+        <p:nvCxnSpPr>
+          <p:cNvPr id="23" name="Connector 22"/>
+          <p:cNvCxnSpPr/>
+          <p:nvPr/>
+        </p:nvCxnSpPr>
+        <p:spPr>
+          <a:xfrm flipV="1">
+            <a:off x="1257300" y="2578100"/>
+            <a:ext cx="0" cy="406400"/>
+          </a:xfrm>
+          <a:prstGeom prst="line">
+            <a:avLst/>
+          </a:prstGeom>
+          <a:ln w="12700">
+            <a:solidFill>
+              <a:srgbClr val="243343"/>
+            </a:solidFill>
+            <a:tailEnd type="triangle" w="sm" len="sm"/>
+          </a:ln>
+        </p:spPr>
+        <p:style>
+          <a:lnRef idx="2">
+            <a:schemeClr val="accent1"/>
+          </a:lnRef>
+          <a:fillRef idx="0">
+            <a:schemeClr val="accent1"/>
+          </a:fillRef>
+          <a:effectRef idx="1">
+            <a:schemeClr val="accent1"/>
+          </a:effectRef>
+          <a:fontRef idx="minor">
+            <a:schemeClr val="tx1"/>
+          </a:fontRef>
+        </p:style>
+      </p:cxnSp>
+      <p:sp>
+        <p:nvSpPr>
+          <p:cNvPr id="24" name="TextBox 23"/>
           <p:cNvSpPr txBox="1"/>
           <p:nvPr/>
         </p:nvSpPr>
         <p:spPr>
           <a:xfrm>
-            <a:off x="4824000" y="1565999"/>
-            <a:ext cx="792000" cy="270000"/>
+            <a:off x="1358900" y="2717800"/>
+            <a:ext cx="1333500" cy="215900"/>
           </a:xfrm>
           <a:prstGeom prst="rect">
             <a:avLst/>
@@ -3942,44 +4138,969 @@
           <a:noFill/>
         </p:spPr>
         <p:txBody>
-          <a:bodyPr wrap="square" lIns="10800" rIns="10800" tIns="3600" bIns="3600">
-            <a:spAutoFit/>
+          <a:bodyPr wrap="none" lIns="0" rIns="0" tIns="0" bIns="0">
+            <a:noAutofit/>
           </a:bodyPr>
           <a:lstStyle/>
           <a:p>
-            <a:pPr algn="l"/>
-            <a:r>
-              <a:rPr sz="1000" b="0">
+            <a:pPr algn="l">
+              <a:lnSpc>
+                <a:spcPts val="1188"/>
+              </a:lnSpc>
+              <a:spcBef>
+                <a:spcPts val="0"/>
+              </a:spcBef>
+              <a:spcAft>
+                <a:spcPts val="0"/>
+              </a:spcAft>
+            </a:pPr>
+            <a:r>
+              <a:rPr sz="1080" b="0" i="0">
                 <a:solidFill>
-                  <a:srgbClr val="1F1F1F"/>
+                  <a:srgbClr val="243343"/>
                 </a:solidFill>
                 <a:latin typeface="Arial"/>
               </a:rPr>
-              <a:t>body orientation</a:t>
-            </a:r>
-          </a:p>
-          <a:p>
-            <a:pPr algn="l"/>
-            <a:r>
-              <a:rPr sz="1000" b="0">
+              <a:t>Sensory feedback</a:t>
+            </a:r>
+          </a:p>
+        </p:txBody>
+      </p:sp>
+      <p:cxnSp>
+        <p:nvCxnSpPr>
+          <p:cNvPr id="25" name="Connector 24"/>
+          <p:cNvCxnSpPr/>
+          <p:nvPr/>
+        </p:nvCxnSpPr>
+        <p:spPr>
+          <a:xfrm>
+            <a:off x="965200" y="1168400"/>
+            <a:ext cx="0" cy="177800"/>
+          </a:xfrm>
+          <a:prstGeom prst="line">
+            <a:avLst/>
+          </a:prstGeom>
+          <a:ln w="12700">
+            <a:solidFill>
+              <a:srgbClr val="243343"/>
+            </a:solidFill>
+            <a:prstDash val="dash"/>
+          </a:ln>
+        </p:spPr>
+        <p:style>
+          <a:lnRef idx="2">
+            <a:schemeClr val="accent1"/>
+          </a:lnRef>
+          <a:fillRef idx="0">
+            <a:schemeClr val="accent1"/>
+          </a:fillRef>
+          <a:effectRef idx="1">
+            <a:schemeClr val="accent1"/>
+          </a:effectRef>
+          <a:fontRef idx="minor">
+            <a:schemeClr val="tx1"/>
+          </a:fontRef>
+        </p:style>
+      </p:cxnSp>
+      <p:cxnSp>
+        <p:nvCxnSpPr>
+          <p:cNvPr id="26" name="Connector 25"/>
+          <p:cNvCxnSpPr/>
+          <p:nvPr/>
+        </p:nvCxnSpPr>
+        <p:spPr>
+          <a:xfrm>
+            <a:off x="965200" y="1346200"/>
+            <a:ext cx="1244600" cy="0"/>
+          </a:xfrm>
+          <a:prstGeom prst="line">
+            <a:avLst/>
+          </a:prstGeom>
+          <a:ln w="12700">
+            <a:solidFill>
+              <a:srgbClr val="243343"/>
+            </a:solidFill>
+            <a:prstDash val="dash"/>
+          </a:ln>
+        </p:spPr>
+        <p:style>
+          <a:lnRef idx="2">
+            <a:schemeClr val="accent1"/>
+          </a:lnRef>
+          <a:fillRef idx="0">
+            <a:schemeClr val="accent1"/>
+          </a:fillRef>
+          <a:effectRef idx="1">
+            <a:schemeClr val="accent1"/>
+          </a:effectRef>
+          <a:fontRef idx="minor">
+            <a:schemeClr val="tx1"/>
+          </a:fontRef>
+        </p:style>
+      </p:cxnSp>
+      <p:cxnSp>
+        <p:nvCxnSpPr>
+          <p:cNvPr id="27" name="Connector 26"/>
+          <p:cNvCxnSpPr/>
+          <p:nvPr/>
+        </p:nvCxnSpPr>
+        <p:spPr>
+          <a:xfrm>
+            <a:off x="2209800" y="1346200"/>
+            <a:ext cx="0" cy="596900"/>
+          </a:xfrm>
+          <a:prstGeom prst="line">
+            <a:avLst/>
+          </a:prstGeom>
+          <a:ln w="12700">
+            <a:solidFill>
+              <a:srgbClr val="243343"/>
+            </a:solidFill>
+            <a:prstDash val="dash"/>
+            <a:tailEnd type="triangle" w="sm" len="sm"/>
+          </a:ln>
+        </p:spPr>
+        <p:style>
+          <a:lnRef idx="2">
+            <a:schemeClr val="accent1"/>
+          </a:lnRef>
+          <a:fillRef idx="0">
+            <a:schemeClr val="accent1"/>
+          </a:fillRef>
+          <a:effectRef idx="1">
+            <a:schemeClr val="accent1"/>
+          </a:effectRef>
+          <a:fontRef idx="minor">
+            <a:schemeClr val="tx1"/>
+          </a:fontRef>
+        </p:style>
+      </p:cxnSp>
+      <p:cxnSp>
+        <p:nvCxnSpPr>
+          <p:cNvPr id="28" name="Connector 27"/>
+          <p:cNvCxnSpPr/>
+          <p:nvPr/>
+        </p:nvCxnSpPr>
+        <p:spPr>
+          <a:xfrm>
+            <a:off x="2971800" y="1168400"/>
+            <a:ext cx="0" cy="317500"/>
+          </a:xfrm>
+          <a:prstGeom prst="line">
+            <a:avLst/>
+          </a:prstGeom>
+          <a:ln w="12700">
+            <a:solidFill>
+              <a:srgbClr val="243343"/>
+            </a:solidFill>
+            <a:prstDash val="dash"/>
+          </a:ln>
+        </p:spPr>
+        <p:style>
+          <a:lnRef idx="2">
+            <a:schemeClr val="accent1"/>
+          </a:lnRef>
+          <a:fillRef idx="0">
+            <a:schemeClr val="accent1"/>
+          </a:fillRef>
+          <a:effectRef idx="1">
+            <a:schemeClr val="accent1"/>
+          </a:effectRef>
+          <a:fontRef idx="minor">
+            <a:schemeClr val="tx1"/>
+          </a:fontRef>
+        </p:style>
+      </p:cxnSp>
+      <p:cxnSp>
+        <p:nvCxnSpPr>
+          <p:cNvPr id="29" name="Connector 28"/>
+          <p:cNvCxnSpPr/>
+          <p:nvPr/>
+        </p:nvCxnSpPr>
+        <p:spPr>
+          <a:xfrm flipH="1">
+            <a:off x="2794000" y="1485900"/>
+            <a:ext cx="177800" cy="0"/>
+          </a:xfrm>
+          <a:prstGeom prst="line">
+            <a:avLst/>
+          </a:prstGeom>
+          <a:ln w="12700">
+            <a:solidFill>
+              <a:srgbClr val="243343"/>
+            </a:solidFill>
+            <a:prstDash val="dash"/>
+          </a:ln>
+        </p:spPr>
+        <p:style>
+          <a:lnRef idx="2">
+            <a:schemeClr val="accent1"/>
+          </a:lnRef>
+          <a:fillRef idx="0">
+            <a:schemeClr val="accent1"/>
+          </a:fillRef>
+          <a:effectRef idx="1">
+            <a:schemeClr val="accent1"/>
+          </a:effectRef>
+          <a:fontRef idx="minor">
+            <a:schemeClr val="tx1"/>
+          </a:fontRef>
+        </p:style>
+      </p:cxnSp>
+      <p:cxnSp>
+        <p:nvCxnSpPr>
+          <p:cNvPr id="30" name="Connector 29"/>
+          <p:cNvCxnSpPr/>
+          <p:nvPr/>
+        </p:nvCxnSpPr>
+        <p:spPr>
+          <a:xfrm>
+            <a:off x="2794000" y="1485900"/>
+            <a:ext cx="0" cy="355600"/>
+          </a:xfrm>
+          <a:prstGeom prst="line">
+            <a:avLst/>
+          </a:prstGeom>
+          <a:ln w="12700">
+            <a:solidFill>
+              <a:srgbClr val="243343"/>
+            </a:solidFill>
+            <a:prstDash val="dash"/>
+          </a:ln>
+        </p:spPr>
+        <p:style>
+          <a:lnRef idx="2">
+            <a:schemeClr val="accent1"/>
+          </a:lnRef>
+          <a:fillRef idx="0">
+            <a:schemeClr val="accent1"/>
+          </a:fillRef>
+          <a:effectRef idx="1">
+            <a:schemeClr val="accent1"/>
+          </a:effectRef>
+          <a:fontRef idx="minor">
+            <a:schemeClr val="tx1"/>
+          </a:fontRef>
+        </p:style>
+      </p:cxnSp>
+      <p:cxnSp>
+        <p:nvCxnSpPr>
+          <p:cNvPr id="31" name="Connector 30"/>
+          <p:cNvCxnSpPr/>
+          <p:nvPr/>
+        </p:nvCxnSpPr>
+        <p:spPr>
+          <a:xfrm flipH="1">
+            <a:off x="2209800" y="1841500"/>
+            <a:ext cx="584200" cy="0"/>
+          </a:xfrm>
+          <a:prstGeom prst="line">
+            <a:avLst/>
+          </a:prstGeom>
+          <a:ln w="12700">
+            <a:solidFill>
+              <a:srgbClr val="243343"/>
+            </a:solidFill>
+            <a:prstDash val="dash"/>
+          </a:ln>
+        </p:spPr>
+        <p:style>
+          <a:lnRef idx="2">
+            <a:schemeClr val="accent1"/>
+          </a:lnRef>
+          <a:fillRef idx="0">
+            <a:schemeClr val="accent1"/>
+          </a:fillRef>
+          <a:effectRef idx="1">
+            <a:schemeClr val="accent1"/>
+          </a:effectRef>
+          <a:fontRef idx="minor">
+            <a:schemeClr val="tx1"/>
+          </a:fontRef>
+        </p:style>
+      </p:cxnSp>
+      <p:cxnSp>
+        <p:nvCxnSpPr>
+          <p:cNvPr id="32" name="Connector 31"/>
+          <p:cNvCxnSpPr/>
+          <p:nvPr/>
+        </p:nvCxnSpPr>
+        <p:spPr>
+          <a:xfrm>
+            <a:off x="2209800" y="1841500"/>
+            <a:ext cx="0" cy="101600"/>
+          </a:xfrm>
+          <a:prstGeom prst="line">
+            <a:avLst/>
+          </a:prstGeom>
+          <a:ln w="12700">
+            <a:solidFill>
+              <a:srgbClr val="243343"/>
+            </a:solidFill>
+            <a:prstDash val="dash"/>
+            <a:tailEnd type="triangle" w="sm" len="sm"/>
+          </a:ln>
+        </p:spPr>
+        <p:style>
+          <a:lnRef idx="2">
+            <a:schemeClr val="accent1"/>
+          </a:lnRef>
+          <a:fillRef idx="0">
+            <a:schemeClr val="accent1"/>
+          </a:fillRef>
+          <a:effectRef idx="1">
+            <a:schemeClr val="accent1"/>
+          </a:effectRef>
+          <a:fontRef idx="minor">
+            <a:schemeClr val="tx1"/>
+          </a:fontRef>
+        </p:style>
+      </p:cxnSp>
+      <p:cxnSp>
+        <p:nvCxnSpPr>
+          <p:cNvPr id="33" name="Connector 32"/>
+          <p:cNvCxnSpPr/>
+          <p:nvPr/>
+        </p:nvCxnSpPr>
+        <p:spPr>
+          <a:xfrm>
+            <a:off x="4978400" y="1168400"/>
+            <a:ext cx="0" cy="304800"/>
+          </a:xfrm>
+          <a:prstGeom prst="line">
+            <a:avLst/>
+          </a:prstGeom>
+          <a:ln w="12700">
+            <a:solidFill>
+              <a:srgbClr val="243343"/>
+            </a:solidFill>
+            <a:prstDash val="dash"/>
+          </a:ln>
+        </p:spPr>
+        <p:style>
+          <a:lnRef idx="2">
+            <a:schemeClr val="accent1"/>
+          </a:lnRef>
+          <a:fillRef idx="0">
+            <a:schemeClr val="accent1"/>
+          </a:fillRef>
+          <a:effectRef idx="1">
+            <a:schemeClr val="accent1"/>
+          </a:effectRef>
+          <a:fontRef idx="minor">
+            <a:schemeClr val="tx1"/>
+          </a:fontRef>
+        </p:style>
+      </p:cxnSp>
+      <p:cxnSp>
+        <p:nvCxnSpPr>
+          <p:cNvPr id="34" name="Connector 33"/>
+          <p:cNvCxnSpPr/>
+          <p:nvPr/>
+        </p:nvCxnSpPr>
+        <p:spPr>
+          <a:xfrm flipH="1">
+            <a:off x="4660900" y="1473200"/>
+            <a:ext cx="317500" cy="0"/>
+          </a:xfrm>
+          <a:prstGeom prst="line">
+            <a:avLst/>
+          </a:prstGeom>
+          <a:ln w="12700">
+            <a:solidFill>
+              <a:srgbClr val="243343"/>
+            </a:solidFill>
+            <a:prstDash val="dash"/>
+          </a:ln>
+        </p:spPr>
+        <p:style>
+          <a:lnRef idx="2">
+            <a:schemeClr val="accent1"/>
+          </a:lnRef>
+          <a:fillRef idx="0">
+            <a:schemeClr val="accent1"/>
+          </a:fillRef>
+          <a:effectRef idx="1">
+            <a:schemeClr val="accent1"/>
+          </a:effectRef>
+          <a:fontRef idx="minor">
+            <a:schemeClr val="tx1"/>
+          </a:fontRef>
+        </p:style>
+      </p:cxnSp>
+      <p:cxnSp>
+        <p:nvCxnSpPr>
+          <p:cNvPr id="35" name="Connector 34"/>
+          <p:cNvCxnSpPr/>
+          <p:nvPr/>
+        </p:nvCxnSpPr>
+        <p:spPr>
+          <a:xfrm>
+            <a:off x="4660900" y="1473200"/>
+            <a:ext cx="0" cy="469900"/>
+          </a:xfrm>
+          <a:prstGeom prst="line">
+            <a:avLst/>
+          </a:prstGeom>
+          <a:ln w="12700">
+            <a:solidFill>
+              <a:srgbClr val="243343"/>
+            </a:solidFill>
+            <a:prstDash val="dash"/>
+            <a:tailEnd type="triangle" w="sm" len="sm"/>
+          </a:ln>
+        </p:spPr>
+        <p:style>
+          <a:lnRef idx="2">
+            <a:schemeClr val="accent1"/>
+          </a:lnRef>
+          <a:fillRef idx="0">
+            <a:schemeClr val="accent1"/>
+          </a:fillRef>
+          <a:effectRef idx="1">
+            <a:schemeClr val="accent1"/>
+          </a:effectRef>
+          <a:fontRef idx="minor">
+            <a:schemeClr val="tx1"/>
+          </a:fontRef>
+        </p:style>
+      </p:cxnSp>
+      <p:sp>
+        <p:nvSpPr>
+          <p:cNvPr id="36" name="TextBox 35"/>
+          <p:cNvSpPr txBox="1"/>
+          <p:nvPr/>
+        </p:nvSpPr>
+        <p:spPr>
+          <a:xfrm>
+            <a:off x="3225800" y="1282700"/>
+            <a:ext cx="1270000" cy="368300"/>
+          </a:xfrm>
+          <a:prstGeom prst="rect">
+            <a:avLst/>
+          </a:prstGeom>
+          <a:noFill/>
+        </p:spPr>
+        <p:txBody>
+          <a:bodyPr wrap="none" lIns="0" rIns="0" tIns="0" bIns="0">
+            <a:noAutofit/>
+          </a:bodyPr>
+          <a:lstStyle/>
+          <a:p>
+            <a:pPr algn="l">
+              <a:lnSpc>
+                <a:spcPts val="1188"/>
+              </a:lnSpc>
+              <a:spcBef>
+                <a:spcPts val="0"/>
+              </a:spcBef>
+              <a:spcAft>
+                <a:spcPts val="0"/>
+              </a:spcAft>
+            </a:pPr>
+            <a:r>
+              <a:rPr sz="1080" b="0" i="0">
                 <a:solidFill>
-                  <a:srgbClr val="1F1F1F"/>
+                  <a:srgbClr val="243343"/>
                 </a:solidFill>
                 <a:latin typeface="Arial"/>
               </a:rPr>
-              <a:t>and vision</a:t>
-            </a:r>
-          </a:p>
-          <a:p>
-            <a:pPr algn="l"/>
-            <a:r>
-              <a:rPr sz="1000" b="0">
+              <a:t>Descending</a:t>
+            </a:r>
+          </a:p>
+          <a:p>
+            <a:pPr algn="l">
+              <a:lnSpc>
+                <a:spcPts val="1188"/>
+              </a:lnSpc>
+              <a:spcBef>
+                <a:spcPts val="0"/>
+              </a:spcBef>
+              <a:spcAft>
+                <a:spcPts val="0"/>
+              </a:spcAft>
+            </a:pPr>
+            <a:r>
+              <a:rPr sz="1080" b="0" i="0">
                 <a:solidFill>
-                  <a:srgbClr val="1F1F1F"/>
+                  <a:srgbClr val="243343"/>
                 </a:solidFill>
                 <a:latin typeface="Arial"/>
               </a:rPr>
-              <a:t>(future)</a:t>
+              <a:t>commands</a:t>
+            </a:r>
+          </a:p>
+        </p:txBody>
+      </p:sp>
+      <p:sp>
+        <p:nvSpPr>
+          <p:cNvPr id="37" name="TextBox 36"/>
+          <p:cNvSpPr txBox="1"/>
+          <p:nvPr/>
+        </p:nvSpPr>
+        <p:spPr>
+          <a:xfrm>
+            <a:off x="152400" y="3162300"/>
+            <a:ext cx="2413000" cy="215900"/>
+          </a:xfrm>
+          <a:prstGeom prst="rect">
+            <a:avLst/>
+          </a:prstGeom>
+          <a:noFill/>
+        </p:spPr>
+        <p:txBody>
+          <a:bodyPr wrap="none" lIns="0" rIns="0" tIns="0" bIns="0">
+            <a:noAutofit/>
+          </a:bodyPr>
+          <a:lstStyle/>
+          <a:p>
+            <a:pPr algn="l">
+              <a:lnSpc>
+                <a:spcPts val="1320"/>
+              </a:lnSpc>
+              <a:spcBef>
+                <a:spcPts val="0"/>
+              </a:spcBef>
+              <a:spcAft>
+                <a:spcPts val="0"/>
+              </a:spcAft>
+            </a:pPr>
+            <a:r>
+              <a:rPr sz="1200" b="1" i="0">
+                <a:solidFill>
+                  <a:srgbClr val="243343"/>
+                </a:solidFill>
+                <a:latin typeface="Arial"/>
+              </a:rPr>
+              <a:t>Simulated mechanical model</a:t>
+            </a:r>
+          </a:p>
+        </p:txBody>
+      </p:sp>
+      <p:sp>
+        <p:nvSpPr>
+          <p:cNvPr id="38" name="Rectangle 37"/>
+          <p:cNvSpPr/>
+          <p:nvPr/>
+        </p:nvSpPr>
+        <p:spPr>
+          <a:xfrm>
+            <a:off x="152400" y="3479800"/>
+            <a:ext cx="5067300" cy="406400"/>
+          </a:xfrm>
+          <a:prstGeom prst="rect">
+            <a:avLst/>
+          </a:prstGeom>
+          <a:solidFill>
+            <a:srgbClr val="F1F5F8"/>
+          </a:solidFill>
+          <a:ln w="12700">
+            <a:solidFill>
+              <a:srgbClr val="243343"/>
+            </a:solidFill>
+          </a:ln>
+        </p:spPr>
+        <p:style>
+          <a:lnRef idx="1">
+            <a:schemeClr val="accent1"/>
+          </a:lnRef>
+          <a:fillRef idx="3">
+            <a:schemeClr val="accent1"/>
+          </a:fillRef>
+          <a:effectRef idx="2">
+            <a:schemeClr val="accent1"/>
+          </a:effectRef>
+          <a:fontRef idx="minor">
+            <a:schemeClr val="lt1"/>
+          </a:fontRef>
+        </p:style>
+        <p:txBody>
+          <a:bodyPr rtlCol="0" anchor="ctr"/>
+          <a:lstStyle/>
+          <a:p>
+            <a:pPr algn="ctr"/>
+          </a:p>
+        </p:txBody>
+      </p:sp>
+      <p:sp>
+        <p:nvSpPr>
+          <p:cNvPr id="39" name="TextBox 38"/>
+          <p:cNvSpPr txBox="1"/>
+          <p:nvPr/>
+        </p:nvSpPr>
+        <p:spPr>
+          <a:xfrm>
+            <a:off x="241300" y="3606165"/>
+            <a:ext cx="4889500" cy="304800"/>
+          </a:xfrm>
+          <a:prstGeom prst="rect">
+            <a:avLst/>
+          </a:prstGeom>
+          <a:noFill/>
+        </p:spPr>
+        <p:txBody>
+          <a:bodyPr wrap="none" lIns="0" rIns="0" tIns="0" bIns="0">
+            <a:noAutofit/>
+          </a:bodyPr>
+          <a:lstStyle/>
+          <a:p>
+            <a:pPr algn="ctr">
+              <a:lnSpc>
+                <a:spcPts val="1210"/>
+              </a:lnSpc>
+              <a:spcBef>
+                <a:spcPts val="0"/>
+              </a:spcBef>
+              <a:spcAft>
+                <a:spcPts val="0"/>
+              </a:spcAft>
+            </a:pPr>
+            <a:r>
+              <a:rPr sz="1100" b="0" i="0">
+                <a:solidFill>
+                  <a:srgbClr val="243343"/>
+                </a:solidFill>
+                <a:latin typeface="Arial"/>
+              </a:rPr>
+              <a:t>BPA actuators and robot model</a:t>
+            </a:r>
+          </a:p>
+        </p:txBody>
+      </p:sp>
+      <p:cxnSp>
+        <p:nvCxnSpPr>
+          <p:cNvPr id="40" name="Connector 39"/>
+          <p:cNvCxnSpPr/>
+          <p:nvPr/>
+        </p:nvCxnSpPr>
+        <p:spPr>
+          <a:xfrm>
+            <a:off x="3632200" y="2578100"/>
+            <a:ext cx="0" cy="901700"/>
+          </a:xfrm>
+          <a:prstGeom prst="line">
+            <a:avLst/>
+          </a:prstGeom>
+          <a:ln w="12700">
+            <a:solidFill>
+              <a:srgbClr val="243343"/>
+            </a:solidFill>
+            <a:tailEnd type="triangle" w="sm" len="sm"/>
+          </a:ln>
+        </p:spPr>
+        <p:style>
+          <a:lnRef idx="2">
+            <a:schemeClr val="accent1"/>
+          </a:lnRef>
+          <a:fillRef idx="0">
+            <a:schemeClr val="accent1"/>
+          </a:fillRef>
+          <a:effectRef idx="1">
+            <a:schemeClr val="accent1"/>
+          </a:effectRef>
+          <a:fontRef idx="minor">
+            <a:schemeClr val="tx1"/>
+          </a:fontRef>
+        </p:style>
+      </p:cxnSp>
+      <p:cxnSp>
+        <p:nvCxnSpPr>
+          <p:cNvPr id="41" name="Connector 40"/>
+          <p:cNvCxnSpPr/>
+          <p:nvPr/>
+        </p:nvCxnSpPr>
+        <p:spPr>
+          <a:xfrm flipV="1">
+            <a:off x="4457700" y="2578100"/>
+            <a:ext cx="0" cy="901700"/>
+          </a:xfrm>
+          <a:prstGeom prst="line">
+            <a:avLst/>
+          </a:prstGeom>
+          <a:ln w="12700">
+            <a:solidFill>
+              <a:srgbClr val="243343"/>
+            </a:solidFill>
+            <a:tailEnd type="triangle" w="sm" len="sm"/>
+          </a:ln>
+        </p:spPr>
+        <p:style>
+          <a:lnRef idx="2">
+            <a:schemeClr val="accent1"/>
+          </a:lnRef>
+          <a:fillRef idx="0">
+            <a:schemeClr val="accent1"/>
+          </a:fillRef>
+          <a:effectRef idx="1">
+            <a:schemeClr val="accent1"/>
+          </a:effectRef>
+          <a:fontRef idx="minor">
+            <a:schemeClr val="tx1"/>
+          </a:fontRef>
+        </p:style>
+      </p:cxnSp>
+      <p:sp>
+        <p:nvSpPr>
+          <p:cNvPr id="42" name="TextBox 41"/>
+          <p:cNvSpPr txBox="1"/>
+          <p:nvPr/>
+        </p:nvSpPr>
+        <p:spPr>
+          <a:xfrm>
+            <a:off x="2679700" y="2743200"/>
+            <a:ext cx="863600" cy="203200"/>
+          </a:xfrm>
+          <a:prstGeom prst="rect">
+            <a:avLst/>
+          </a:prstGeom>
+          <a:noFill/>
+        </p:spPr>
+        <p:txBody>
+          <a:bodyPr wrap="none" lIns="0" rIns="0" tIns="0" bIns="0">
+            <a:noAutofit/>
+          </a:bodyPr>
+          <a:lstStyle/>
+          <a:p>
+            <a:pPr algn="r">
+              <a:lnSpc>
+                <a:spcPts val="1188"/>
+              </a:lnSpc>
+              <a:spcBef>
+                <a:spcPts val="0"/>
+              </a:spcBef>
+              <a:spcAft>
+                <a:spcPts val="0"/>
+              </a:spcAft>
+            </a:pPr>
+            <a:r>
+              <a:rPr sz="1080" b="0" i="0">
+                <a:solidFill>
+                  <a:srgbClr val="243343"/>
+                </a:solidFill>
+                <a:latin typeface="Arial"/>
+              </a:rPr>
+              <a:t>activation</a:t>
+            </a:r>
+          </a:p>
+        </p:txBody>
+      </p:sp>
+      <p:sp>
+        <p:nvSpPr>
+          <p:cNvPr id="43" name="TextBox 42"/>
+          <p:cNvSpPr txBox="1"/>
+          <p:nvPr/>
+        </p:nvSpPr>
+        <p:spPr>
+          <a:xfrm>
+            <a:off x="4546600" y="2717800"/>
+            <a:ext cx="1257300" cy="368300"/>
+          </a:xfrm>
+          <a:prstGeom prst="rect">
+            <a:avLst/>
+          </a:prstGeom>
+          <a:noFill/>
+        </p:spPr>
+        <p:txBody>
+          <a:bodyPr wrap="none" lIns="0" rIns="0" tIns="0" bIns="0">
+            <a:noAutofit/>
+          </a:bodyPr>
+          <a:lstStyle/>
+          <a:p>
+            <a:pPr algn="l">
+              <a:lnSpc>
+                <a:spcPts val="1188"/>
+              </a:lnSpc>
+              <a:spcBef>
+                <a:spcPts val="0"/>
+              </a:spcBef>
+              <a:spcAft>
+                <a:spcPts val="0"/>
+              </a:spcAft>
+            </a:pPr>
+            <a:r>
+              <a:rPr sz="1080" b="0" i="0">
+                <a:solidFill>
+                  <a:srgbClr val="243343"/>
+                </a:solidFill>
+                <a:latin typeface="Arial"/>
+              </a:rPr>
+              <a:t>Proprioceptive</a:t>
+            </a:r>
+          </a:p>
+          <a:p>
+            <a:pPr algn="l">
+              <a:lnSpc>
+                <a:spcPts val="1188"/>
+              </a:lnSpc>
+              <a:spcBef>
+                <a:spcPts val="0"/>
+              </a:spcBef>
+              <a:spcAft>
+                <a:spcPts val="0"/>
+              </a:spcAft>
+            </a:pPr>
+            <a:r>
+              <a:rPr sz="1080" b="0" i="0">
+                <a:solidFill>
+                  <a:srgbClr val="243343"/>
+                </a:solidFill>
+                <a:latin typeface="Arial"/>
+              </a:rPr>
+              <a:t>and contact input</a:t>
+            </a:r>
+          </a:p>
+        </p:txBody>
+      </p:sp>
+      <p:cxnSp>
+        <p:nvCxnSpPr>
+          <p:cNvPr id="44" name="Connector 43"/>
+          <p:cNvCxnSpPr/>
+          <p:nvPr/>
+        </p:nvCxnSpPr>
+        <p:spPr>
+          <a:xfrm>
+            <a:off x="5219700" y="3683000"/>
+            <a:ext cx="469900" cy="0"/>
+          </a:xfrm>
+          <a:prstGeom prst="line">
+            <a:avLst/>
+          </a:prstGeom>
+          <a:ln w="12700">
+            <a:solidFill>
+              <a:srgbClr val="6C7680"/>
+            </a:solidFill>
+            <a:prstDash val="dash"/>
+          </a:ln>
+        </p:spPr>
+        <p:style>
+          <a:lnRef idx="2">
+            <a:schemeClr val="accent1"/>
+          </a:lnRef>
+          <a:fillRef idx="0">
+            <a:schemeClr val="accent1"/>
+          </a:fillRef>
+          <a:effectRef idx="1">
+            <a:schemeClr val="accent1"/>
+          </a:effectRef>
+          <a:fontRef idx="minor">
+            <a:schemeClr val="tx1"/>
+          </a:fontRef>
+        </p:style>
+      </p:cxnSp>
+      <p:cxnSp>
+        <p:nvCxnSpPr>
+          <p:cNvPr id="45" name="Connector 44"/>
+          <p:cNvCxnSpPr/>
+          <p:nvPr/>
+        </p:nvCxnSpPr>
+        <p:spPr>
+          <a:xfrm flipV="1">
+            <a:off x="5689600" y="800100"/>
+            <a:ext cx="0" cy="2882900"/>
+          </a:xfrm>
+          <a:prstGeom prst="line">
+            <a:avLst/>
+          </a:prstGeom>
+          <a:ln w="12700">
+            <a:solidFill>
+              <a:srgbClr val="6C7680"/>
+            </a:solidFill>
+            <a:prstDash val="dash"/>
+          </a:ln>
+        </p:spPr>
+        <p:style>
+          <a:lnRef idx="2">
+            <a:schemeClr val="accent1"/>
+          </a:lnRef>
+          <a:fillRef idx="0">
+            <a:schemeClr val="accent1"/>
+          </a:fillRef>
+          <a:effectRef idx="1">
+            <a:schemeClr val="accent1"/>
+          </a:effectRef>
+          <a:fontRef idx="minor">
+            <a:schemeClr val="tx1"/>
+          </a:fontRef>
+        </p:style>
+      </p:cxnSp>
+      <p:cxnSp>
+        <p:nvCxnSpPr>
+          <p:cNvPr id="46" name="Connector 45"/>
+          <p:cNvCxnSpPr/>
+          <p:nvPr/>
+        </p:nvCxnSpPr>
+        <p:spPr>
+          <a:xfrm>
+            <a:off x="5689600" y="800100"/>
+            <a:ext cx="101600" cy="0"/>
+          </a:xfrm>
+          <a:prstGeom prst="line">
+            <a:avLst/>
+          </a:prstGeom>
+          <a:ln w="12700">
+            <a:solidFill>
+              <a:srgbClr val="6C7680"/>
+            </a:solidFill>
+            <a:prstDash val="dash"/>
+            <a:tailEnd type="triangle" w="sm" len="sm"/>
+          </a:ln>
+        </p:spPr>
+        <p:style>
+          <a:lnRef idx="2">
+            <a:schemeClr val="accent1"/>
+          </a:lnRef>
+          <a:fillRef idx="0">
+            <a:schemeClr val="accent1"/>
+          </a:fillRef>
+          <a:effectRef idx="1">
+            <a:schemeClr val="accent1"/>
+          </a:effectRef>
+          <a:fontRef idx="minor">
+            <a:schemeClr val="tx1"/>
+          </a:fontRef>
+        </p:style>
+      </p:cxnSp>
+      <p:sp>
+        <p:nvSpPr>
+          <p:cNvPr id="47" name="TextBox 46"/>
+          <p:cNvSpPr txBox="1"/>
+          <p:nvPr/>
+        </p:nvSpPr>
+        <p:spPr>
+          <a:xfrm>
+            <a:off x="165100" y="4089400"/>
+            <a:ext cx="5461000" cy="203200"/>
+          </a:xfrm>
+          <a:prstGeom prst="rect">
+            <a:avLst/>
+          </a:prstGeom>
+          <a:noFill/>
+        </p:spPr>
+        <p:txBody>
+          <a:bodyPr wrap="none" lIns="0" rIns="0" tIns="0" bIns="0">
+            <a:noAutofit/>
+          </a:bodyPr>
+          <a:lstStyle/>
+          <a:p>
+            <a:pPr algn="l">
+              <a:lnSpc>
+                <a:spcPts val="1188"/>
+              </a:lnSpc>
+              <a:spcBef>
+                <a:spcPts val="0"/>
+              </a:spcBef>
+              <a:spcAft>
+                <a:spcPts val="0"/>
+              </a:spcAft>
+            </a:pPr>
+            <a:r>
+              <a:rPr sz="1080" b="0" i="0">
+                <a:solidFill>
+                  <a:srgbClr val="6C7680"/>
+                </a:solidFill>
+                <a:latin typeface="Arial"/>
+              </a:rPr>
+              <a:t>Balance-platform hardware is a precursor to orientation feedback.</a:t>
             </a:r>
           </a:p>
         </p:txBody>
